--- a/entry/src/main/resources/rawfile/onlyoffice/sample.pptx
+++ b/entry/src/main/resources/rawfile/onlyoffice/sample.pptx
@@ -51,7 +51,7 @@
 
 <file path=ppt/slides/slide1.xml><?xml version="1.0" encoding="utf-8"?>
 <p:sld xmlns:a="http://schemas.openxmlformats.org/drawingml/2006/main" xmlns:r="http://schemas.openxmlformats.org/officeDocument/2006/relationships" xmlns:p="http://schemas.openxmlformats.org/presentationml/2006/main">
-  <p:cSld>
+  <p:cSld name="Slide 1">
     <p:spTree>
       <p:nvGrpSpPr>
         <p:cNvPr id="1" name=""/>
@@ -65,12 +65,37 @@
           <p:cNvSpPr/>
           <p:nvPr/>
         </p:nvSpPr>
-        <p:spPr/>
+        <p:spPr>
+          <a:xfrm>
+            <a:off x="609600" y="548640"/>
+            <a:ext cx="10972800" cy="2286000"/>
+          </a:xfrm>
+          <a:prstGeom prst="rect">
+            <a:avLst/>
+          </a:prstGeom>
+          <a:solidFill>
+            <a:srgbClr val="EEF0F6"/>
+          </a:solidFill>
+          <a:ln w="19050">
+            <a:solidFill>
+              <a:srgbClr val="2B579A"/>
+            </a:solidFill>
+          </a:ln>
+        </p:spPr>
         <p:txBody>
-          <a:bodyPr/>
+          <a:bodyPr anchor="ctr" anchorCtr="1">
+            <a:normAutofit/>
+          </a:bodyPr>
+          <a:lstStyle/>
           <a:p>
+            <a:pPr algn="ctr"/>
             <a:r>
-              <a:rPr lang="ru-RU"/>
+              <a:rPr lang="ru-RU" sz="3600" b="1">
+                <a:solidFill>
+                  <a:srgbClr val="1B2A4A"/>
+                </a:solidFill>
+                <a:latin typeface="Arial"/>
+              </a:rPr>
               <a:t>POC2-PPTX-ОБРАЗЕЦ-1788369680217</a:t>
             </a:r>
           </a:p>
